--- a/Kluber_EAL_Grease_simple.pptx
+++ b/Kluber_EAL_Grease_simple.pptx
@@ -5848,7 +5848,7 @@
         <p:spPr>
           <a:xfrm>
             <a:off x="502920" y="1325880"/>
-            <a:ext cx="5532120" cy="329184"/>
+            <a:ext cx="5440680" cy="329184"/>
           </a:xfrm>
           <a:prstGeom prst="rect">
             <a:avLst/>
@@ -5892,7 +5892,7 @@
         <p:spPr>
           <a:xfrm>
             <a:off x="612648" y="1325880"/>
-            <a:ext cx="5349240" cy="329184"/>
+            <a:ext cx="5257800" cy="329184"/>
           </a:xfrm>
           <a:prstGeom prst="rect">
             <a:avLst/>
@@ -5933,7 +5933,7 @@
         <p:spPr>
           <a:xfrm>
             <a:off x="502920" y="1783080"/>
-            <a:ext cx="5532120" cy="1463040"/>
+            <a:ext cx="5440680" cy="1463040"/>
           </a:xfrm>
           <a:prstGeom prst="rect">
             <a:avLst/>
@@ -6015,8 +6015,8 @@
         </p:nvSpPr>
         <p:spPr>
           <a:xfrm>
-            <a:off x="502920" y="3383280"/>
-            <a:ext cx="5532120" cy="329184"/>
+            <a:off x="502920" y="3017520"/>
+            <a:ext cx="5440680" cy="329184"/>
           </a:xfrm>
           <a:prstGeom prst="rect">
             <a:avLst/>
@@ -6059,8 +6059,8 @@
         </p:nvSpPr>
         <p:spPr>
           <a:xfrm>
-            <a:off x="612648" y="3383280"/>
-            <a:ext cx="5349240" cy="329184"/>
+            <a:off x="612648" y="3017520"/>
+            <a:ext cx="5257800" cy="329184"/>
           </a:xfrm>
           <a:prstGeom prst="rect">
             <a:avLst/>
@@ -6100,8 +6100,8 @@
         </p:nvSpPr>
         <p:spPr>
           <a:xfrm>
-            <a:off x="502920" y="3840480"/>
-            <a:ext cx="2697480" cy="310896"/>
+            <a:off x="502920" y="3474720"/>
+            <a:ext cx="2651760" cy="310896"/>
           </a:xfrm>
           <a:prstGeom prst="rect">
             <a:avLst/>
@@ -6144,8 +6144,8 @@
         </p:nvSpPr>
         <p:spPr>
           <a:xfrm>
-            <a:off x="576072" y="3840480"/>
-            <a:ext cx="2551176" cy="310896"/>
+            <a:off x="576072" y="3474720"/>
+            <a:ext cx="2505456" cy="310896"/>
           </a:xfrm>
           <a:prstGeom prst="rect">
             <a:avLst/>
@@ -6185,7 +6185,7 @@
         </p:nvSpPr>
         <p:spPr>
           <a:xfrm>
-            <a:off x="3200400" y="3840480"/>
+            <a:off x="3154680" y="3474720"/>
             <a:ext cx="1234440" cy="310896"/>
           </a:xfrm>
           <a:prstGeom prst="rect">
@@ -6229,7 +6229,7 @@
         </p:nvSpPr>
         <p:spPr>
           <a:xfrm>
-            <a:off x="3273552" y="3840480"/>
+            <a:off x="3227832" y="3474720"/>
             <a:ext cx="1088136" cy="310896"/>
           </a:xfrm>
           <a:prstGeom prst="rect">
@@ -6270,8 +6270,8 @@
         </p:nvSpPr>
         <p:spPr>
           <a:xfrm>
-            <a:off x="4434840" y="3840480"/>
-            <a:ext cx="1600200" cy="310896"/>
+            <a:off x="4389120" y="3474720"/>
+            <a:ext cx="1554480" cy="310896"/>
           </a:xfrm>
           <a:prstGeom prst="rect">
             <a:avLst/>
@@ -6314,8 +6314,8 @@
         </p:nvSpPr>
         <p:spPr>
           <a:xfrm>
-            <a:off x="4507992" y="3840480"/>
-            <a:ext cx="1453896" cy="310896"/>
+            <a:off x="4462272" y="3474720"/>
+            <a:ext cx="1408176" cy="310896"/>
           </a:xfrm>
           <a:prstGeom prst="rect">
             <a:avLst/>
@@ -6355,8 +6355,8 @@
         </p:nvSpPr>
         <p:spPr>
           <a:xfrm>
-            <a:off x="502920" y="4151376"/>
-            <a:ext cx="2697480" cy="310896"/>
+            <a:off x="502920" y="3785616"/>
+            <a:ext cx="2651760" cy="310896"/>
           </a:xfrm>
           <a:prstGeom prst="rect">
             <a:avLst/>
@@ -6401,8 +6401,8 @@
         </p:nvSpPr>
         <p:spPr>
           <a:xfrm>
-            <a:off x="576072" y="4151376"/>
-            <a:ext cx="2551176" cy="310896"/>
+            <a:off x="576072" y="3785616"/>
+            <a:ext cx="2505456" cy="310896"/>
           </a:xfrm>
           <a:prstGeom prst="rect">
             <a:avLst/>
@@ -6442,7 +6442,7 @@
         </p:nvSpPr>
         <p:spPr>
           <a:xfrm>
-            <a:off x="3200400" y="4151376"/>
+            <a:off x="3154680" y="3785616"/>
             <a:ext cx="1234440" cy="310896"/>
           </a:xfrm>
           <a:prstGeom prst="rect">
@@ -6488,7 +6488,7 @@
         </p:nvSpPr>
         <p:spPr>
           <a:xfrm>
-            <a:off x="3273552" y="4151376"/>
+            <a:off x="3227832" y="3785616"/>
             <a:ext cx="1088136" cy="310896"/>
           </a:xfrm>
           <a:prstGeom prst="rect">
@@ -6529,8 +6529,8 @@
         </p:nvSpPr>
         <p:spPr>
           <a:xfrm>
-            <a:off x="4434840" y="4151376"/>
-            <a:ext cx="1600200" cy="310896"/>
+            <a:off x="4389120" y="3785616"/>
+            <a:ext cx="1554480" cy="310896"/>
           </a:xfrm>
           <a:prstGeom prst="rect">
             <a:avLst/>
@@ -6575,8 +6575,8 @@
         </p:nvSpPr>
         <p:spPr>
           <a:xfrm>
-            <a:off x="4507992" y="4151376"/>
-            <a:ext cx="1453896" cy="310896"/>
+            <a:off x="4462272" y="3785616"/>
+            <a:ext cx="1408176" cy="310896"/>
           </a:xfrm>
           <a:prstGeom prst="rect">
             <a:avLst/>
@@ -6616,8 +6616,8 @@
         </p:nvSpPr>
         <p:spPr>
           <a:xfrm>
-            <a:off x="502920" y="4462272"/>
-            <a:ext cx="2697480" cy="310896"/>
+            <a:off x="502920" y="4096512"/>
+            <a:ext cx="2651760" cy="310896"/>
           </a:xfrm>
           <a:prstGeom prst="rect">
             <a:avLst/>
@@ -6662,8 +6662,8 @@
         </p:nvSpPr>
         <p:spPr>
           <a:xfrm>
-            <a:off x="576072" y="4462272"/>
-            <a:ext cx="2551176" cy="310896"/>
+            <a:off x="576072" y="4096512"/>
+            <a:ext cx="2505456" cy="310896"/>
           </a:xfrm>
           <a:prstGeom prst="rect">
             <a:avLst/>
@@ -6703,7 +6703,7 @@
         </p:nvSpPr>
         <p:spPr>
           <a:xfrm>
-            <a:off x="3200400" y="4462272"/>
+            <a:off x="3154680" y="4096512"/>
             <a:ext cx="1234440" cy="310896"/>
           </a:xfrm>
           <a:prstGeom prst="rect">
@@ -6749,7 +6749,7 @@
         </p:nvSpPr>
         <p:spPr>
           <a:xfrm>
-            <a:off x="3273552" y="4462272"/>
+            <a:off x="3227832" y="4096512"/>
             <a:ext cx="1088136" cy="310896"/>
           </a:xfrm>
           <a:prstGeom prst="rect">
@@ -6790,8 +6790,8 @@
         </p:nvSpPr>
         <p:spPr>
           <a:xfrm>
-            <a:off x="4434840" y="4462272"/>
-            <a:ext cx="1600200" cy="310896"/>
+            <a:off x="4389120" y="4096512"/>
+            <a:ext cx="1554480" cy="310896"/>
           </a:xfrm>
           <a:prstGeom prst="rect">
             <a:avLst/>
@@ -6836,8 +6836,8 @@
         </p:nvSpPr>
         <p:spPr>
           <a:xfrm>
-            <a:off x="4507992" y="4462272"/>
-            <a:ext cx="1453896" cy="310896"/>
+            <a:off x="4462272" y="4096512"/>
+            <a:ext cx="1408176" cy="310896"/>
           </a:xfrm>
           <a:prstGeom prst="rect">
             <a:avLst/>
@@ -6877,8 +6877,8 @@
         </p:nvSpPr>
         <p:spPr>
           <a:xfrm>
-            <a:off x="502920" y="4773168"/>
-            <a:ext cx="2697480" cy="310896"/>
+            <a:off x="502920" y="4407408"/>
+            <a:ext cx="2651760" cy="310896"/>
           </a:xfrm>
           <a:prstGeom prst="rect">
             <a:avLst/>
@@ -6923,8 +6923,8 @@
         </p:nvSpPr>
         <p:spPr>
           <a:xfrm>
-            <a:off x="576072" y="4773168"/>
-            <a:ext cx="2551176" cy="310896"/>
+            <a:off x="576072" y="4407408"/>
+            <a:ext cx="2505456" cy="310896"/>
           </a:xfrm>
           <a:prstGeom prst="rect">
             <a:avLst/>
@@ -6964,7 +6964,7 @@
         </p:nvSpPr>
         <p:spPr>
           <a:xfrm>
-            <a:off x="3200400" y="4773168"/>
+            <a:off x="3154680" y="4407408"/>
             <a:ext cx="1234440" cy="310896"/>
           </a:xfrm>
           <a:prstGeom prst="rect">
@@ -7010,7 +7010,7 @@
         </p:nvSpPr>
         <p:spPr>
           <a:xfrm>
-            <a:off x="3273552" y="4773168"/>
+            <a:off x="3227832" y="4407408"/>
             <a:ext cx="1088136" cy="310896"/>
           </a:xfrm>
           <a:prstGeom prst="rect">
@@ -7051,8 +7051,8 @@
         </p:nvSpPr>
         <p:spPr>
           <a:xfrm>
-            <a:off x="4434840" y="4773168"/>
-            <a:ext cx="1600200" cy="310896"/>
+            <a:off x="4389120" y="4407408"/>
+            <a:ext cx="1554480" cy="310896"/>
           </a:xfrm>
           <a:prstGeom prst="rect">
             <a:avLst/>
@@ -7097,8 +7097,8 @@
         </p:nvSpPr>
         <p:spPr>
           <a:xfrm>
-            <a:off x="4507992" y="4773168"/>
-            <a:ext cx="1453896" cy="310896"/>
+            <a:off x="4462272" y="4407408"/>
+            <a:ext cx="1408176" cy="310896"/>
           </a:xfrm>
           <a:prstGeom prst="rect">
             <a:avLst/>
@@ -7138,8 +7138,8 @@
         </p:nvSpPr>
         <p:spPr>
           <a:xfrm>
-            <a:off x="6355080" y="1325880"/>
-            <a:ext cx="5532120" cy="329184"/>
+            <a:off x="6245352" y="1325880"/>
+            <a:ext cx="5440680" cy="329184"/>
           </a:xfrm>
           <a:prstGeom prst="rect">
             <a:avLst/>
@@ -7182,8 +7182,8 @@
         </p:nvSpPr>
         <p:spPr>
           <a:xfrm>
-            <a:off x="6464808" y="1325880"/>
-            <a:ext cx="5349240" cy="329184"/>
+            <a:off x="6355080" y="1325880"/>
+            <a:ext cx="5257800" cy="329184"/>
           </a:xfrm>
           <a:prstGeom prst="rect">
             <a:avLst/>
@@ -7223,8 +7223,8 @@
         </p:nvSpPr>
         <p:spPr>
           <a:xfrm>
-            <a:off x="6355080" y="1783080"/>
-            <a:ext cx="5532120" cy="1371600"/>
+            <a:off x="6245352" y="1783080"/>
+            <a:ext cx="5440680" cy="1371600"/>
           </a:xfrm>
           <a:prstGeom prst="rect">
             <a:avLst/>
@@ -7267,8 +7267,8 @@
         </p:nvSpPr>
         <p:spPr>
           <a:xfrm>
-            <a:off x="6355080" y="1911096"/>
-            <a:ext cx="5532120" cy="1143000"/>
+            <a:off x="6245352" y="1911096"/>
+            <a:ext cx="5440680" cy="1143000"/>
           </a:xfrm>
           <a:prstGeom prst="rect">
             <a:avLst/>
@@ -7326,8 +7326,8 @@
         </p:nvSpPr>
         <p:spPr>
           <a:xfrm>
-            <a:off x="6355080" y="3319272"/>
-            <a:ext cx="5532120" cy="822960"/>
+            <a:off x="6245352" y="3319272"/>
+            <a:ext cx="5440680" cy="822960"/>
           </a:xfrm>
           <a:prstGeom prst="rect">
             <a:avLst/>
@@ -7396,7 +7396,7 @@
         </p:blipFill>
         <p:spPr>
           <a:xfrm>
-            <a:off x="8321040" y="4233672"/>
+            <a:off x="8211312" y="4233672"/>
             <a:ext cx="1743162" cy="1691640"/>
           </a:xfrm>
           <a:prstGeom prst="rect">
@@ -7412,8 +7412,8 @@
         </p:nvSpPr>
         <p:spPr>
           <a:xfrm>
-            <a:off x="6355080" y="6016752"/>
-            <a:ext cx="5532120" cy="274320"/>
+            <a:off x="6245352" y="6016752"/>
+            <a:ext cx="5440680" cy="274320"/>
           </a:xfrm>
           <a:prstGeom prst="rect">
             <a:avLst/>
@@ -7598,7 +7598,7 @@
         <p:spPr>
           <a:xfrm>
             <a:off x="502920" y="1325880"/>
-            <a:ext cx="5532120" cy="329184"/>
+            <a:ext cx="5440680" cy="329184"/>
           </a:xfrm>
           <a:prstGeom prst="rect">
             <a:avLst/>
@@ -7642,7 +7642,7 @@
         <p:spPr>
           <a:xfrm>
             <a:off x="612648" y="1325880"/>
-            <a:ext cx="5349240" cy="329184"/>
+            <a:ext cx="5257800" cy="329184"/>
           </a:xfrm>
           <a:prstGeom prst="rect">
             <a:avLst/>
@@ -7707,7 +7707,7 @@
         <p:spPr>
           <a:xfrm>
             <a:off x="502920" y="3657599"/>
-            <a:ext cx="5532120" cy="274320"/>
+            <a:ext cx="5440680" cy="274320"/>
           </a:xfrm>
           <a:prstGeom prst="rect">
             <a:avLst/>
@@ -7748,7 +7748,7 @@
         <p:spPr>
           <a:xfrm>
             <a:off x="502920" y="4069080"/>
-            <a:ext cx="5532120" cy="329184"/>
+            <a:ext cx="5440680" cy="329184"/>
           </a:xfrm>
           <a:prstGeom prst="rect">
             <a:avLst/>
@@ -7792,7 +7792,7 @@
         <p:spPr>
           <a:xfrm>
             <a:off x="612648" y="4069080"/>
-            <a:ext cx="5349240" cy="329184"/>
+            <a:ext cx="5257800" cy="329184"/>
           </a:xfrm>
           <a:prstGeom prst="rect">
             <a:avLst/>
@@ -7833,7 +7833,7 @@
         <p:spPr>
           <a:xfrm>
             <a:off x="502920" y="4526280"/>
-            <a:ext cx="2788920" cy="310896"/>
+            <a:ext cx="2697480" cy="310896"/>
           </a:xfrm>
           <a:prstGeom prst="rect">
             <a:avLst/>
@@ -7877,7 +7877,7 @@
         <p:spPr>
           <a:xfrm>
             <a:off x="576072" y="4526280"/>
-            <a:ext cx="2642616" cy="310896"/>
+            <a:ext cx="2551176" cy="310896"/>
           </a:xfrm>
           <a:prstGeom prst="rect">
             <a:avLst/>
@@ -7917,7 +7917,7 @@
         </p:nvSpPr>
         <p:spPr>
           <a:xfrm>
-            <a:off x="3291840" y="4526280"/>
+            <a:off x="3200400" y="4526280"/>
             <a:ext cx="1371600" cy="310896"/>
           </a:xfrm>
           <a:prstGeom prst="rect">
@@ -7961,7 +7961,7 @@
         </p:nvSpPr>
         <p:spPr>
           <a:xfrm>
-            <a:off x="3364992" y="4526280"/>
+            <a:off x="3273552" y="4526280"/>
             <a:ext cx="1225296" cy="310896"/>
           </a:xfrm>
           <a:prstGeom prst="rect">
@@ -8002,7 +8002,7 @@
         </p:nvSpPr>
         <p:spPr>
           <a:xfrm>
-            <a:off x="4663440" y="4526280"/>
+            <a:off x="4572000" y="4526280"/>
             <a:ext cx="1371600" cy="310896"/>
           </a:xfrm>
           <a:prstGeom prst="rect">
@@ -8046,7 +8046,7 @@
         </p:nvSpPr>
         <p:spPr>
           <a:xfrm>
-            <a:off x="4736592" y="4526280"/>
+            <a:off x="4645152" y="4526280"/>
             <a:ext cx="1225296" cy="310896"/>
           </a:xfrm>
           <a:prstGeom prst="rect">
@@ -8088,7 +8088,7 @@
         <p:spPr>
           <a:xfrm>
             <a:off x="502920" y="4837176"/>
-            <a:ext cx="2788920" cy="310896"/>
+            <a:ext cx="2697480" cy="310896"/>
           </a:xfrm>
           <a:prstGeom prst="rect">
             <a:avLst/>
@@ -8134,7 +8134,7 @@
         <p:spPr>
           <a:xfrm>
             <a:off x="576072" y="4837176"/>
-            <a:ext cx="2642616" cy="310896"/>
+            <a:ext cx="2551176" cy="310896"/>
           </a:xfrm>
           <a:prstGeom prst="rect">
             <a:avLst/>
@@ -8174,7 +8174,7 @@
         </p:nvSpPr>
         <p:spPr>
           <a:xfrm>
-            <a:off x="3291840" y="4837176"/>
+            <a:off x="3200400" y="4837176"/>
             <a:ext cx="1371600" cy="310896"/>
           </a:xfrm>
           <a:prstGeom prst="rect">
@@ -8220,7 +8220,7 @@
         </p:nvSpPr>
         <p:spPr>
           <a:xfrm>
-            <a:off x="3364992" y="4837176"/>
+            <a:off x="3273552" y="4837176"/>
             <a:ext cx="1225296" cy="310896"/>
           </a:xfrm>
           <a:prstGeom prst="rect">
@@ -8261,7 +8261,7 @@
         </p:nvSpPr>
         <p:spPr>
           <a:xfrm>
-            <a:off x="4663440" y="4837176"/>
+            <a:off x="4572000" y="4837176"/>
             <a:ext cx="1371600" cy="310896"/>
           </a:xfrm>
           <a:prstGeom prst="rect">
@@ -8307,7 +8307,7 @@
         </p:nvSpPr>
         <p:spPr>
           <a:xfrm>
-            <a:off x="4736592" y="4837176"/>
+            <a:off x="4645152" y="4837176"/>
             <a:ext cx="1225296" cy="310896"/>
           </a:xfrm>
           <a:prstGeom prst="rect">
@@ -8349,7 +8349,7 @@
         <p:spPr>
           <a:xfrm>
             <a:off x="502920" y="5148072"/>
-            <a:ext cx="2788920" cy="310896"/>
+            <a:ext cx="2697480" cy="310896"/>
           </a:xfrm>
           <a:prstGeom prst="rect">
             <a:avLst/>
@@ -8395,7 +8395,7 @@
         <p:spPr>
           <a:xfrm>
             <a:off x="576072" y="5148072"/>
-            <a:ext cx="2642616" cy="310896"/>
+            <a:ext cx="2551176" cy="310896"/>
           </a:xfrm>
           <a:prstGeom prst="rect">
             <a:avLst/>
@@ -8435,7 +8435,7 @@
         </p:nvSpPr>
         <p:spPr>
           <a:xfrm>
-            <a:off x="3291840" y="5148072"/>
+            <a:off x="3200400" y="5148072"/>
             <a:ext cx="1371600" cy="310896"/>
           </a:xfrm>
           <a:prstGeom prst="rect">
@@ -8481,7 +8481,7 @@
         </p:nvSpPr>
         <p:spPr>
           <a:xfrm>
-            <a:off x="3364992" y="5148072"/>
+            <a:off x="3273552" y="5148072"/>
             <a:ext cx="1225296" cy="310896"/>
           </a:xfrm>
           <a:prstGeom prst="rect">
@@ -8522,7 +8522,7 @@
         </p:nvSpPr>
         <p:spPr>
           <a:xfrm>
-            <a:off x="4663440" y="5148072"/>
+            <a:off x="4572000" y="5148072"/>
             <a:ext cx="1371600" cy="310896"/>
           </a:xfrm>
           <a:prstGeom prst="rect">
@@ -8568,7 +8568,7 @@
         </p:nvSpPr>
         <p:spPr>
           <a:xfrm>
-            <a:off x="4736592" y="5148072"/>
+            <a:off x="4645152" y="5148072"/>
             <a:ext cx="1225296" cy="310896"/>
           </a:xfrm>
           <a:prstGeom prst="rect">
@@ -8610,7 +8610,7 @@
         <p:spPr>
           <a:xfrm>
             <a:off x="502920" y="5568696"/>
-            <a:ext cx="5532120" cy="274320"/>
+            <a:ext cx="5440680" cy="274320"/>
           </a:xfrm>
           <a:prstGeom prst="rect">
             <a:avLst/>
@@ -8650,8 +8650,8 @@
         </p:nvSpPr>
         <p:spPr>
           <a:xfrm>
-            <a:off x="6355080" y="1325880"/>
-            <a:ext cx="5532120" cy="329184"/>
+            <a:off x="6245352" y="1325880"/>
+            <a:ext cx="5440680" cy="329184"/>
           </a:xfrm>
           <a:prstGeom prst="rect">
             <a:avLst/>
@@ -8694,8 +8694,8 @@
         </p:nvSpPr>
         <p:spPr>
           <a:xfrm>
-            <a:off x="6464808" y="1325880"/>
-            <a:ext cx="5349240" cy="329184"/>
+            <a:off x="6355080" y="1325880"/>
+            <a:ext cx="5257800" cy="329184"/>
           </a:xfrm>
           <a:prstGeom prst="rect">
             <a:avLst/>
@@ -8743,8 +8743,8 @@
         </p:blipFill>
         <p:spPr>
           <a:xfrm>
-            <a:off x="6355080" y="1783080"/>
-            <a:ext cx="2651760" cy="1751162"/>
+            <a:off x="6245352" y="1783080"/>
+            <a:ext cx="2606040" cy="1720970"/>
           </a:xfrm>
           <a:prstGeom prst="rect">
             <a:avLst/>
@@ -8767,8 +8767,8 @@
         </p:blipFill>
         <p:spPr>
           <a:xfrm>
-            <a:off x="9235440" y="1783080"/>
-            <a:ext cx="2651760" cy="1639977"/>
+            <a:off x="9079992" y="1783080"/>
+            <a:ext cx="2606040" cy="1611702"/>
           </a:xfrm>
           <a:prstGeom prst="rect">
             <a:avLst/>
@@ -8783,8 +8783,8 @@
         </p:nvSpPr>
         <p:spPr>
           <a:xfrm>
-            <a:off x="6355080" y="3566160"/>
-            <a:ext cx="2651760" cy="685800"/>
+            <a:off x="6245352" y="3566160"/>
+            <a:ext cx="2606040" cy="685800"/>
           </a:xfrm>
           <a:prstGeom prst="rect">
             <a:avLst/>
@@ -8842,8 +8842,8 @@
         </p:nvSpPr>
         <p:spPr>
           <a:xfrm>
-            <a:off x="9235440" y="3566160"/>
-            <a:ext cx="2651760" cy="685800"/>
+            <a:off x="9079992" y="3566160"/>
+            <a:ext cx="2606040" cy="685800"/>
           </a:xfrm>
           <a:prstGeom prst="rect">
             <a:avLst/>
@@ -8901,8 +8901,8 @@
         </p:nvSpPr>
         <p:spPr>
           <a:xfrm>
-            <a:off x="6355080" y="4480560"/>
-            <a:ext cx="5532120" cy="868680"/>
+            <a:off x="6245352" y="4480560"/>
+            <a:ext cx="5440680" cy="868680"/>
           </a:xfrm>
           <a:prstGeom prst="rect">
             <a:avLst/>
@@ -8945,8 +8945,8 @@
         </p:nvSpPr>
         <p:spPr>
           <a:xfrm>
-            <a:off x="6537960" y="4480560"/>
-            <a:ext cx="5166360" cy="868680"/>
+            <a:off x="6428232" y="4480560"/>
+            <a:ext cx="5074920" cy="868680"/>
           </a:xfrm>
           <a:prstGeom prst="rect">
             <a:avLst/>
@@ -9079,7 +9079,7 @@
                 <a:ea typeface="맑은 고딕"/>
                 <a:cs typeface="맑은 고딕"/>
               </a:rPr>
-              <a:t>Klüberbio AM 92-142  —  −60 °C 굴곡 스트립(Bending Strip) 시험</a:t>
+              <a:t>Klüberbio AM 92-142  —  -60 °C 굴곡 스트립(Bending Strip) 시험</a:t>
             </a:r>
           </a:p>
         </p:txBody>
@@ -9134,7 +9134,7 @@
         <p:spPr>
           <a:xfrm>
             <a:off x="502920" y="1325880"/>
-            <a:ext cx="5532120" cy="329184"/>
+            <a:ext cx="5440680" cy="329184"/>
           </a:xfrm>
           <a:prstGeom prst="rect">
             <a:avLst/>
@@ -9178,7 +9178,7 @@
         <p:spPr>
           <a:xfrm>
             <a:off x="612648" y="1325880"/>
-            <a:ext cx="5349240" cy="329184"/>
+            <a:ext cx="5257800" cy="329184"/>
           </a:xfrm>
           <a:prstGeom prst="rect">
             <a:avLst/>
@@ -9219,7 +9219,7 @@
         <p:spPr>
           <a:xfrm>
             <a:off x="502920" y="1783080"/>
-            <a:ext cx="5532120" cy="822960"/>
+            <a:ext cx="5440680" cy="822960"/>
           </a:xfrm>
           <a:prstGeom prst="rect">
             <a:avLst/>
@@ -9284,7 +9284,7 @@
         <p:spPr>
           <a:xfrm>
             <a:off x="502920" y="2743200"/>
-            <a:ext cx="5532120" cy="329184"/>
+            <a:ext cx="5440680" cy="329184"/>
           </a:xfrm>
           <a:prstGeom prst="rect">
             <a:avLst/>
@@ -9328,7 +9328,7 @@
         <p:spPr>
           <a:xfrm>
             <a:off x="612648" y="2743200"/>
-            <a:ext cx="5349240" cy="329184"/>
+            <a:ext cx="5257800" cy="329184"/>
           </a:xfrm>
           <a:prstGeom prst="rect">
             <a:avLst/>
@@ -9454,7 +9454,7 @@
         <p:spPr>
           <a:xfrm>
             <a:off x="1051560" y="3200400"/>
-            <a:ext cx="4983480" cy="384048"/>
+            <a:ext cx="4892040" cy="384048"/>
           </a:xfrm>
           <a:prstGeom prst="rect">
             <a:avLst/>
@@ -9580,7 +9580,7 @@
         <p:spPr>
           <a:xfrm>
             <a:off x="1051560" y="3675888"/>
-            <a:ext cx="4983480" cy="384048"/>
+            <a:ext cx="4892040" cy="384048"/>
           </a:xfrm>
           <a:prstGeom prst="rect">
             <a:avLst/>
@@ -9706,7 +9706,7 @@
         <p:spPr>
           <a:xfrm>
             <a:off x="1051560" y="4151376"/>
-            <a:ext cx="4983480" cy="384048"/>
+            <a:ext cx="4892040" cy="384048"/>
           </a:xfrm>
           <a:prstGeom prst="rect">
             <a:avLst/>
@@ -9747,7 +9747,7 @@
         <p:spPr>
           <a:xfrm>
             <a:off x="502920" y="4800600"/>
-            <a:ext cx="5532120" cy="777240"/>
+            <a:ext cx="5440680" cy="777240"/>
           </a:xfrm>
           <a:prstGeom prst="rect">
             <a:avLst/>
@@ -9791,7 +9791,7 @@
         <p:spPr>
           <a:xfrm>
             <a:off x="685800" y="4800600"/>
-            <a:ext cx="5166360" cy="777240"/>
+            <a:ext cx="5074920" cy="777240"/>
           </a:xfrm>
           <a:prstGeom prst="rect">
             <a:avLst/>
@@ -9835,7 +9835,7 @@
         <p:spPr>
           <a:xfrm>
             <a:off x="502920" y="5760720"/>
-            <a:ext cx="5532120" cy="365760"/>
+            <a:ext cx="5440680" cy="365760"/>
           </a:xfrm>
           <a:prstGeom prst="rect">
             <a:avLst/>
@@ -9862,7 +9862,7 @@
                 <a:ea typeface="맑은 고딕"/>
                 <a:cs typeface="맑은 고딕"/>
               </a:rPr>
-              <a:t>유동점(Pour Point)  −30 °C  —  저온 환경 운용에 유리</a:t>
+              <a:t>유동점(Pour Point)  -30 °C  —  저온 환경 운용에 유리</a:t>
             </a:r>
           </a:p>
         </p:txBody>
@@ -9875,8 +9875,8 @@
         </p:nvSpPr>
         <p:spPr>
           <a:xfrm>
-            <a:off x="6355080" y="1325880"/>
-            <a:ext cx="5532120" cy="329184"/>
+            <a:off x="6245352" y="1325880"/>
+            <a:ext cx="5440680" cy="329184"/>
           </a:xfrm>
           <a:prstGeom prst="rect">
             <a:avLst/>
@@ -9919,8 +9919,8 @@
         </p:nvSpPr>
         <p:spPr>
           <a:xfrm>
-            <a:off x="6464808" y="1325880"/>
-            <a:ext cx="5349240" cy="329184"/>
+            <a:off x="6355080" y="1325880"/>
+            <a:ext cx="5257800" cy="329184"/>
           </a:xfrm>
           <a:prstGeom prst="rect">
             <a:avLst/>
@@ -9947,7 +9947,7 @@
                 <a:ea typeface="맑은 고딕"/>
                 <a:cs typeface="맑은 고딕"/>
               </a:rPr>
-              <a:t>−60 °C 저온 굴곡 시험 결과</a:t>
+              <a:t>-60 °C 저온 굴곡 시험 결과</a:t>
             </a:r>
           </a:p>
         </p:txBody>
@@ -9968,8 +9968,8 @@
         </p:blipFill>
         <p:spPr>
           <a:xfrm>
-            <a:off x="6355080" y="1783080"/>
-            <a:ext cx="2651760" cy="1409519"/>
+            <a:off x="6245352" y="1783080"/>
+            <a:ext cx="2606040" cy="1385217"/>
           </a:xfrm>
           <a:prstGeom prst="rect">
             <a:avLst/>
@@ -9992,8 +9992,8 @@
         </p:blipFill>
         <p:spPr>
           <a:xfrm>
-            <a:off x="9235440" y="1783080"/>
-            <a:ext cx="2651760" cy="1409519"/>
+            <a:off x="9079992" y="1783080"/>
+            <a:ext cx="2606040" cy="1385217"/>
           </a:xfrm>
           <a:prstGeom prst="rect">
             <a:avLst/>
@@ -10008,8 +10008,8 @@
         </p:nvSpPr>
         <p:spPr>
           <a:xfrm>
-            <a:off x="6355080" y="3300984"/>
-            <a:ext cx="2651760" cy="685800"/>
+            <a:off x="6245352" y="3300984"/>
+            <a:ext cx="2606040" cy="685800"/>
           </a:xfrm>
           <a:prstGeom prst="rect">
             <a:avLst/>
@@ -10067,8 +10067,8 @@
         </p:nvSpPr>
         <p:spPr>
           <a:xfrm>
-            <a:off x="9235440" y="3300984"/>
-            <a:ext cx="2651760" cy="685800"/>
+            <a:off x="9079992" y="3300984"/>
+            <a:ext cx="2606040" cy="685800"/>
           </a:xfrm>
           <a:prstGeom prst="rect">
             <a:avLst/>
@@ -10126,8 +10126,8 @@
         </p:nvSpPr>
         <p:spPr>
           <a:xfrm>
-            <a:off x="6355080" y="4169664"/>
-            <a:ext cx="5532120" cy="914400"/>
+            <a:off x="6245352" y="4169664"/>
+            <a:ext cx="5440680" cy="914400"/>
           </a:xfrm>
           <a:prstGeom prst="rect">
             <a:avLst/>
@@ -10170,8 +10170,8 @@
         </p:nvSpPr>
         <p:spPr>
           <a:xfrm>
-            <a:off x="6537960" y="4169664"/>
-            <a:ext cx="5166360" cy="914400"/>
+            <a:off x="6428232" y="4169664"/>
+            <a:ext cx="5074920" cy="914400"/>
           </a:xfrm>
           <a:prstGeom prst="rect">
             <a:avLst/>
@@ -10201,7 +10201,7 @@
                 <a:ea typeface="맑은 고딕"/>
                 <a:cs typeface="맑은 고딕"/>
               </a:rPr>
-              <a:t>−60 °C 에서 24시간 냉각 후 굴곡을 주어도 피막이 갈라지거나 벗겨지지 않았습니다.</a:t>
+              <a:t>-60 °C 에서 24시간 냉각 후 굴곡을 주어도 피막이 갈라지거나 벗겨지지 않았습니다.</a:t>
             </a:r>
           </a:p>
         </p:txBody>
